--- a/Semana09_22MAY26/ServiciosREST.pptx
+++ b/Semana09_22MAY26/ServiciosREST.pptx
@@ -261,7 +261,7 @@
           <a:p>
             <a:fld id="{90F04A8F-FABF-4000-837B-F437EFF6148C}" type="datetimeFigureOut">
               <a:rPr lang="es-ES" smtClean="0"/>
-              <a:t>07/10/2025</a:t>
+              <a:t>22/05/2026</a:t>
             </a:fld>
             <a:endParaRPr lang="es-ES"/>
           </a:p>
@@ -459,7 +459,7 @@
           <a:p>
             <a:fld id="{90F04A8F-FABF-4000-837B-F437EFF6148C}" type="datetimeFigureOut">
               <a:rPr lang="es-ES" smtClean="0"/>
-              <a:t>07/10/2025</a:t>
+              <a:t>22/05/2026</a:t>
             </a:fld>
             <a:endParaRPr lang="es-ES"/>
           </a:p>
@@ -667,7 +667,7 @@
           <a:p>
             <a:fld id="{90F04A8F-FABF-4000-837B-F437EFF6148C}" type="datetimeFigureOut">
               <a:rPr lang="es-ES" smtClean="0"/>
-              <a:t>07/10/2025</a:t>
+              <a:t>22/05/2026</a:t>
             </a:fld>
             <a:endParaRPr lang="es-ES"/>
           </a:p>
@@ -865,7 +865,7 @@
           <a:p>
             <a:fld id="{90F04A8F-FABF-4000-837B-F437EFF6148C}" type="datetimeFigureOut">
               <a:rPr lang="es-ES" smtClean="0"/>
-              <a:t>07/10/2025</a:t>
+              <a:t>22/05/2026</a:t>
             </a:fld>
             <a:endParaRPr lang="es-ES"/>
           </a:p>
@@ -1140,7 +1140,7 @@
           <a:p>
             <a:fld id="{90F04A8F-FABF-4000-837B-F437EFF6148C}" type="datetimeFigureOut">
               <a:rPr lang="es-ES" smtClean="0"/>
-              <a:t>07/10/2025</a:t>
+              <a:t>22/05/2026</a:t>
             </a:fld>
             <a:endParaRPr lang="es-ES"/>
           </a:p>
@@ -1405,7 +1405,7 @@
           <a:p>
             <a:fld id="{90F04A8F-FABF-4000-837B-F437EFF6148C}" type="datetimeFigureOut">
               <a:rPr lang="es-ES" smtClean="0"/>
-              <a:t>07/10/2025</a:t>
+              <a:t>22/05/2026</a:t>
             </a:fld>
             <a:endParaRPr lang="es-ES"/>
           </a:p>
@@ -1817,7 +1817,7 @@
           <a:p>
             <a:fld id="{90F04A8F-FABF-4000-837B-F437EFF6148C}" type="datetimeFigureOut">
               <a:rPr lang="es-ES" smtClean="0"/>
-              <a:t>07/10/2025</a:t>
+              <a:t>22/05/2026</a:t>
             </a:fld>
             <a:endParaRPr lang="es-ES"/>
           </a:p>
@@ -1958,7 +1958,7 @@
           <a:p>
             <a:fld id="{90F04A8F-FABF-4000-837B-F437EFF6148C}" type="datetimeFigureOut">
               <a:rPr lang="es-ES" smtClean="0"/>
-              <a:t>07/10/2025</a:t>
+              <a:t>22/05/2026</a:t>
             </a:fld>
             <a:endParaRPr lang="es-ES"/>
           </a:p>
@@ -2071,7 +2071,7 @@
           <a:p>
             <a:fld id="{90F04A8F-FABF-4000-837B-F437EFF6148C}" type="datetimeFigureOut">
               <a:rPr lang="es-ES" smtClean="0"/>
-              <a:t>07/10/2025</a:t>
+              <a:t>22/05/2026</a:t>
             </a:fld>
             <a:endParaRPr lang="es-ES"/>
           </a:p>
@@ -2382,7 +2382,7 @@
           <a:p>
             <a:fld id="{90F04A8F-FABF-4000-837B-F437EFF6148C}" type="datetimeFigureOut">
               <a:rPr lang="es-ES" smtClean="0"/>
-              <a:t>07/10/2025</a:t>
+              <a:t>22/05/2026</a:t>
             </a:fld>
             <a:endParaRPr lang="es-ES"/>
           </a:p>
@@ -2670,7 +2670,7 @@
           <a:p>
             <a:fld id="{90F04A8F-FABF-4000-837B-F437EFF6148C}" type="datetimeFigureOut">
               <a:rPr lang="es-ES" smtClean="0"/>
-              <a:t>07/10/2025</a:t>
+              <a:t>22/05/2026</a:t>
             </a:fld>
             <a:endParaRPr lang="es-ES"/>
           </a:p>
@@ -2911,7 +2911,7 @@
           <a:p>
             <a:fld id="{90F04A8F-FABF-4000-837B-F437EFF6148C}" type="datetimeFigureOut">
               <a:rPr lang="es-ES" smtClean="0"/>
-              <a:t>07/10/2025</a:t>
+              <a:t>22/05/2026</a:t>
             </a:fld>
             <a:endParaRPr lang="es-ES"/>
           </a:p>
@@ -4049,7 +4049,7 @@
             <a:pPr algn="ctr"/>
             <a:r>
               <a:rPr lang="es-ES" sz="2400" dirty="0"/>
-              <a:t>WworkSpace-UPN-2025-2</a:t>
+              <a:t>WworkSpace-UNI-2026-1</a:t>
             </a:r>
           </a:p>
         </p:txBody>
